--- a/presentation_draft.pptx
+++ b/presentation_draft.pptx
@@ -4999,7 +4999,7 @@
                 <a:latin typeface="맑은 고딕"/>
                 <a:ea typeface="맑은 고딕"/>
               </a:rPr>
-              <a:t>인게임 10분 시점 데이터 기반 승패 예측 및 핵심 승리요인 분석</a:t>
+              <a:t>인게임 시점별 경기 데이터 기반 승패 예측 및 핵심 승리요인 분석</a:t>
             </a:r>
           </a:p>
           <a:p>
